--- a/D013/D013_문제 1_발표자료(C2).pptx
+++ b/D013/D013_문제 1_발표자료(C2).pptx
@@ -10346,14 +10346,23 @@
             <p:ph type="ctrTitle"/>
           </p:nvPr>
         </p:nvSpPr>
-        <p:spPr/>
+        <p:spPr>
+          <a:xfrm>
+            <a:off x="1801368" y="1664208"/>
+            <a:ext cx="8586216" cy="1097527"/>
+          </a:xfrm>
+        </p:spPr>
         <p:txBody>
           <a:bodyPr rtlCol="0">
             <a:normAutofit/>
           </a:bodyPr>
           <a:lstStyle/>
           <a:p>
-            <a:pPr algn="l" latinLnBrk="0"/>
+            <a:pPr algn="l" latinLnBrk="0">
+              <a:spcBef>
+                <a:spcPts val="1200"/>
+              </a:spcBef>
+            </a:pPr>
             <a:r>
               <a:rPr lang="ko-KR" altLang="en-US" sz="5400" b="1" i="0" dirty="0">
                 <a:solidFill>
@@ -10405,7 +10414,9 @@
         </p:nvSpPr>
         <p:spPr/>
         <p:txBody>
-          <a:bodyPr rtlCol="0"/>
+          <a:bodyPr rtlCol="0">
+            <a:normAutofit fontScale="92500"/>
+          </a:bodyPr>
           <a:lstStyle/>
           <a:p>
             <a:pPr rtl="0"/>
@@ -10448,10 +10459,178 @@
             <a:r>
               <a:rPr lang="ko-KR" altLang="en-US" dirty="0"/>
               <a:t>안나영</a:t>
+            </a:r>
+            <a:r>
+              <a:rPr lang="en-US" altLang="ko-KR" dirty="0"/>
+              <a:t>(</a:t>
+            </a:r>
+            <a:r>
+              <a:rPr lang="ko-KR" altLang="en-US" dirty="0"/>
+              <a:t>발표</a:t>
+            </a:r>
+            <a:r>
+              <a:rPr lang="en-US" altLang="ko-KR" dirty="0"/>
+              <a:t>)</a:t>
             </a:r>
             <a:endParaRPr lang="ko-KR" altLang="en-US" dirty="0">
               <a:latin typeface="맑은 고딕" panose="020B0503020000020004" pitchFamily="50" charset="-127"/>
               <a:ea typeface="맑은 고딕" panose="020B0503020000020004" pitchFamily="50" charset="-127"/>
+            </a:endParaRPr>
+          </a:p>
+        </p:txBody>
+      </p:sp>
+      <p:sp>
+        <p:nvSpPr>
+          <p:cNvPr id="4" name="TextBox 3">
+            <a:extLst>
+              <a:ext uri="{FF2B5EF4-FFF2-40B4-BE49-F238E27FC236}">
+                <a16:creationId xmlns:a16="http://schemas.microsoft.com/office/drawing/2014/main" id="{D3C2D2D7-3595-4D39-AC13-F3E2547FF456}"/>
+              </a:ext>
+            </a:extLst>
+          </p:cNvPr>
+          <p:cNvSpPr txBox="1"/>
+          <p:nvPr/>
+        </p:nvSpPr>
+        <p:spPr>
+          <a:xfrm>
+            <a:off x="1924070" y="2715768"/>
+            <a:ext cx="8340811" cy="923330"/>
+          </a:xfrm>
+          <a:prstGeom prst="rect">
+            <a:avLst/>
+          </a:prstGeom>
+          <a:noFill/>
+        </p:spPr>
+        <p:txBody>
+          <a:bodyPr wrap="square" rtlCol="0">
+            <a:spAutoFit/>
+          </a:bodyPr>
+          <a:lstStyle/>
+          <a:p>
+            <a:r>
+              <a:rPr lang="en-US" altLang="ko-KR" sz="1800" b="0" i="0" dirty="0">
+                <a:solidFill>
+                  <a:schemeClr val="bg2">
+                    <a:lumMod val="50000"/>
+                  </a:schemeClr>
+                </a:solidFill>
+                <a:effectLst/>
+                <a:latin typeface="Pretendard Variable"/>
+              </a:rPr>
+              <a:t>- </a:t>
+            </a:r>
+            <a:r>
+              <a:rPr lang="ko-KR" altLang="en-US" sz="1800" b="0" i="0" dirty="0">
+                <a:solidFill>
+                  <a:schemeClr val="bg2">
+                    <a:lumMod val="50000"/>
+                  </a:schemeClr>
+                </a:solidFill>
+                <a:effectLst/>
+                <a:latin typeface="Pretendard Variable"/>
+              </a:rPr>
+              <a:t>이번 실습에서는 직접 표본을 뽑고</a:t>
+            </a:r>
+            <a:r>
+              <a:rPr lang="en-US" altLang="ko-KR" sz="1800" b="0" i="0" dirty="0">
+                <a:solidFill>
+                  <a:schemeClr val="bg2">
+                    <a:lumMod val="50000"/>
+                  </a:schemeClr>
+                </a:solidFill>
+                <a:effectLst/>
+                <a:latin typeface="Pretendard Variable"/>
+              </a:rPr>
+              <a:t>, </a:t>
+            </a:r>
+            <a:r>
+              <a:rPr lang="ko-KR" altLang="en-US" sz="1800" b="0" i="0" dirty="0">
+                <a:solidFill>
+                  <a:schemeClr val="bg2">
+                    <a:lumMod val="50000"/>
+                  </a:schemeClr>
+                </a:solidFill>
+                <a:effectLst/>
+                <a:latin typeface="Pretendard Variable"/>
+              </a:rPr>
+              <a:t>표본 평균을 구해보며</a:t>
+            </a:r>
+            <a:r>
+              <a:rPr lang="en-US" altLang="ko-KR" sz="1800" b="0" i="0" dirty="0">
+                <a:solidFill>
+                  <a:schemeClr val="bg2">
+                    <a:lumMod val="50000"/>
+                  </a:schemeClr>
+                </a:solidFill>
+                <a:effectLst/>
+                <a:latin typeface="Pretendard Variable"/>
+              </a:rPr>
+              <a:t>,</a:t>
+            </a:r>
+            <a:br>
+              <a:rPr lang="en-US" altLang="ko-KR" sz="1800" b="0" i="0" dirty="0">
+                <a:solidFill>
+                  <a:schemeClr val="bg2">
+                    <a:lumMod val="50000"/>
+                  </a:schemeClr>
+                </a:solidFill>
+                <a:effectLst/>
+                <a:latin typeface="Pretendard Variable"/>
+              </a:rPr>
+            </a:br>
+            <a:endParaRPr lang="en-US" altLang="ko-KR" sz="1800" b="0" i="0" dirty="0">
+              <a:solidFill>
+                <a:schemeClr val="bg2">
+                  <a:lumMod val="50000"/>
+                </a:schemeClr>
+              </a:solidFill>
+              <a:effectLst/>
+              <a:latin typeface="Pretendard Variable"/>
+            </a:endParaRPr>
+          </a:p>
+          <a:p>
+            <a:r>
+              <a:rPr lang="en-US" altLang="ko-KR" sz="1800" b="0" i="0" dirty="0">
+                <a:solidFill>
+                  <a:schemeClr val="bg2">
+                    <a:lumMod val="50000"/>
+                  </a:schemeClr>
+                </a:solidFill>
+                <a:effectLst/>
+                <a:latin typeface="Pretendard Variable"/>
+              </a:rPr>
+              <a:t>**“</a:t>
+            </a:r>
+            <a:r>
+              <a:rPr lang="ko-KR" altLang="en-US" sz="1800" b="0" i="0" dirty="0">
+                <a:solidFill>
+                  <a:schemeClr val="bg2">
+                    <a:lumMod val="50000"/>
+                  </a:schemeClr>
+                </a:solidFill>
+                <a:effectLst/>
+                <a:latin typeface="Pretendard Variable"/>
+              </a:rPr>
+              <a:t>표본마다 결과가 달라질 수 있다”**는 추론 통계의 핵심 개념을 체험해봅니다</a:t>
+            </a:r>
+            <a:r>
+              <a:rPr lang="en-US" altLang="ko-KR" sz="1800" b="0" i="0" dirty="0">
+                <a:solidFill>
+                  <a:schemeClr val="bg2">
+                    <a:lumMod val="50000"/>
+                  </a:schemeClr>
+                </a:solidFill>
+                <a:effectLst/>
+                <a:latin typeface="Pretendard Variable"/>
+              </a:rPr>
+              <a:t>.</a:t>
+            </a:r>
+            <a:endParaRPr lang="ko-KR" altLang="en-US" dirty="0">
+              <a:solidFill>
+                <a:schemeClr val="bg2">
+                  <a:lumMod val="50000"/>
+                </a:schemeClr>
+              </a:solidFill>
             </a:endParaRPr>
           </a:p>
         </p:txBody>
@@ -10622,7 +10801,7 @@
         <p:spPr>
           <a:xfrm>
             <a:off x="666784" y="2129695"/>
-            <a:ext cx="10960443" cy="2308324"/>
+            <a:ext cx="10960443" cy="2262158"/>
           </a:xfrm>
           <a:prstGeom prst="rect">
             <a:avLst/>
@@ -10661,9 +10840,11 @@
             </a:r>
           </a:p>
           <a:p>
-            <a:endParaRPr lang="en-US" altLang="ko-KR" b="1" dirty="0"/>
-          </a:p>
-          <a:p>
+            <a:pPr>
+              <a:spcBef>
+                <a:spcPts val="600"/>
+              </a:spcBef>
+            </a:pPr>
             <a:r>
               <a:rPr lang="ko-KR" altLang="en-US" dirty="0"/>
               <a:t>▶️</a:t>
@@ -10687,6 +10868,11 @@
             <a:endParaRPr lang="en-US" altLang="ko-KR" dirty="0"/>
           </a:p>
           <a:p>
+            <a:pPr>
+              <a:spcBef>
+                <a:spcPts val="600"/>
+              </a:spcBef>
+            </a:pPr>
             <a:r>
               <a:rPr lang="ko-KR" altLang="en-US" dirty="0"/>
               <a:t>표본이 모집단에서 무작위로 추출되기 때문에</a:t>
@@ -10713,11 +10899,11 @@
             </a:r>
             <a:r>
               <a:rPr lang="ko-KR" altLang="en-US" dirty="0"/>
-              <a:t>표본추출변동</a:t>
+              <a:t>표본추출변동 </a:t>
             </a:r>
             <a:r>
               <a:rPr lang="en-US" altLang="ko-KR" dirty="0"/>
-              <a:t>/</a:t>
+              <a:t>/ </a:t>
             </a:r>
             <a:r>
               <a:rPr lang="ko-KR" altLang="en-US" dirty="0"/>
@@ -10729,6 +10915,11 @@
             </a:r>
           </a:p>
           <a:p>
+            <a:pPr>
+              <a:spcBef>
+                <a:spcPts val="600"/>
+              </a:spcBef>
+            </a:pPr>
             <a:r>
               <a:rPr lang="ko-KR" altLang="en-US" dirty="0"/>
               <a:t>다만 표본이 모집단을 어느 정도 대표하고 있으므로</a:t>
@@ -10930,7 +11121,7 @@
         <p:spPr>
           <a:xfrm>
             <a:off x="672721" y="2123757"/>
-            <a:ext cx="10960443" cy="3416320"/>
+            <a:ext cx="10960443" cy="3447098"/>
           </a:xfrm>
           <a:prstGeom prst="rect">
             <a:avLst/>
@@ -10969,9 +11160,11 @@
             </a:r>
           </a:p>
           <a:p>
-            <a:endParaRPr lang="en-US" altLang="ko-KR" b="1" dirty="0"/>
-          </a:p>
-          <a:p>
+            <a:pPr>
+              <a:spcBef>
+                <a:spcPts val="600"/>
+              </a:spcBef>
+            </a:pPr>
             <a:r>
               <a:rPr lang="ko-KR" altLang="en-US" dirty="0"/>
               <a:t>▶️</a:t>
@@ -10998,13 +11191,26 @@
             </a:r>
           </a:p>
           <a:p>
+            <a:pPr>
+              <a:spcBef>
+                <a:spcPts val="600"/>
+              </a:spcBef>
+            </a:pPr>
             <a:r>
               <a:rPr lang="ko-KR" altLang="en-US" dirty="0"/>
-              <a:t>이는 **중심극한정리</a:t>
+              <a:t>이는 </a:t>
             </a:r>
             <a:r>
               <a:rPr lang="en-US" altLang="ko-KR" dirty="0"/>
-              <a:t>(Central Limit Theorem)**</a:t>
+              <a:t>‘</a:t>
+            </a:r>
+            <a:r>
+              <a:rPr lang="ko-KR" altLang="en-US" dirty="0"/>
+              <a:t>중심극한정리</a:t>
+            </a:r>
+            <a:r>
+              <a:rPr lang="en-US" altLang="ko-KR" dirty="0"/>
+              <a:t>(Central Limit Theorem)’</a:t>
             </a:r>
             <a:r>
               <a:rPr lang="ko-KR" altLang="en-US" dirty="0"/>
@@ -11068,6 +11274,11 @@
             </a:r>
           </a:p>
           <a:p>
+            <a:pPr>
+              <a:spcBef>
+                <a:spcPts val="600"/>
+              </a:spcBef>
+            </a:pPr>
             <a:r>
               <a:rPr lang="ko-KR" altLang="en-US" dirty="0"/>
               <a:t>표본 크기가 작을 때는 원래 모집단의 비대칭성</a:t>
@@ -11106,6 +11317,11 @@
             </a:r>
           </a:p>
           <a:p>
+            <a:pPr>
+              <a:spcBef>
+                <a:spcPts val="600"/>
+              </a:spcBef>
+            </a:pPr>
             <a:r>
               <a:rPr lang="ko-KR" altLang="en-US" dirty="0"/>
               <a:t>이 원리 덕분에</a:t>
@@ -11130,12 +11346,6 @@
               <a:rPr lang="en-US" altLang="ko-KR" dirty="0"/>
               <a:t>.</a:t>
             </a:r>
-            <a:endParaRPr lang="en-US" altLang="ko-KR" dirty="0">
-              <a:solidFill>
-                <a:srgbClr val="BBBEBF"/>
-              </a:solidFill>
-              <a:latin typeface="Consolas" panose="020B0609020204030204" pitchFamily="49" charset="0"/>
-            </a:endParaRPr>
           </a:p>
           <a:p>
             <a:endParaRPr lang="en-US" altLang="ko-KR" dirty="0">
@@ -11249,7 +11459,9 @@
         </p:nvSpPr>
         <p:spPr/>
         <p:txBody>
-          <a:bodyPr rtlCol="0"/>
+          <a:bodyPr rtlCol="0">
+            <a:normAutofit fontScale="92500"/>
+          </a:bodyPr>
           <a:lstStyle/>
           <a:p>
             <a:pPr rtl="0"/>
@@ -11292,6 +11504,18 @@
             <a:r>
               <a:rPr lang="ko-KR" altLang="en-US" dirty="0"/>
               <a:t>안나영</a:t>
+            </a:r>
+            <a:r>
+              <a:rPr lang="en-US" altLang="ko-KR" dirty="0"/>
+              <a:t>(</a:t>
+            </a:r>
+            <a:r>
+              <a:rPr lang="ko-KR" altLang="en-US" dirty="0"/>
+              <a:t>발표</a:t>
+            </a:r>
+            <a:r>
+              <a:rPr lang="en-US" altLang="ko-KR" dirty="0"/>
+              <a:t>)</a:t>
             </a:r>
             <a:endParaRPr lang="ko-KR" altLang="en-US" dirty="0">
               <a:latin typeface="맑은 고딕" panose="020B0503020000020004" pitchFamily="50" charset="-127"/>
@@ -12167,13 +12391,31 @@
               <a:t>(</a:t>
             </a:r>
             <a:r>
-              <a:rPr lang="en-US" altLang="ko-KR" dirty="0" err="1">
+              <a:rPr lang="en-US" altLang="ko-KR" dirty="0">
                 <a:solidFill>
                   <a:schemeClr val="accent4"/>
                 </a:solidFill>
                 <a:latin typeface="Consolas" panose="020B0609020204030204" pitchFamily="49" charset="0"/>
               </a:rPr>
               <a:t>f</a:t>
+            </a:r>
+            <a:r>
+              <a:rPr lang="en-US" altLang="ko-KR" dirty="0">
+                <a:solidFill>
+                  <a:srgbClr val="00B0F0"/>
+                </a:solidFill>
+                <a:latin typeface="Consolas" panose="020B0609020204030204" pitchFamily="49" charset="0"/>
+              </a:rPr>
+              <a:t>"</a:t>
+            </a:r>
+            <a:r>
+              <a:rPr lang="ko-KR" altLang="en-US" dirty="0">
+                <a:solidFill>
+                  <a:srgbClr val="00B0F0"/>
+                </a:solidFill>
+                <a:latin typeface="Consolas" panose="020B0609020204030204" pitchFamily="49" charset="0"/>
+              </a:rPr>
+              <a:t>모집단 </a:t>
             </a:r>
             <a:r>
               <a:rPr lang="en-US" altLang="ko-KR" dirty="0" err="1">
@@ -12182,7 +12424,7 @@
                 </a:solidFill>
                 <a:latin typeface="Consolas" panose="020B0609020204030204" pitchFamily="49" charset="0"/>
               </a:rPr>
-              <a:t>"df_pop</a:t>
+              <a:t>df_pop</a:t>
             </a:r>
             <a:r>
               <a:rPr lang="ko-KR" altLang="en-US" dirty="0">
@@ -12255,7 +12497,7 @@
                 </a:solidFill>
                 <a:latin typeface="Consolas" panose="020B0609020204030204" pitchFamily="49" charset="0"/>
               </a:rPr>
-              <a:t>2</a:t>
+              <a:t>3</a:t>
             </a:r>
             <a:r>
               <a:rPr lang="en-US" altLang="ko-KR" dirty="0">
@@ -12312,7 +12554,7 @@
               <a:t>(</a:t>
             </a:r>
             <a:r>
-              <a:rPr lang="en-US" altLang="ko-KR" b="0" dirty="0" err="1">
+              <a:rPr lang="en-US" altLang="ko-KR" b="0" dirty="0">
                 <a:solidFill>
                   <a:schemeClr val="accent4"/>
                 </a:solidFill>
@@ -12320,16 +12562,6 @@
                 <a:latin typeface="Consolas" panose="020B0609020204030204" pitchFamily="49" charset="0"/>
               </a:rPr>
               <a:t>f</a:t>
-            </a:r>
-            <a:r>
-              <a:rPr lang="en-US" altLang="ko-KR" b="0" dirty="0" err="1">
-                <a:solidFill>
-                  <a:srgbClr val="00B0F0"/>
-                </a:solidFill>
-                <a:effectLst/>
-                <a:latin typeface="Consolas" panose="020B0609020204030204" pitchFamily="49" charset="0"/>
-              </a:rPr>
-              <a:t>"sample</a:t>
             </a:r>
             <a:r>
               <a:rPr lang="en-US" altLang="ko-KR" b="0" dirty="0">
@@ -12339,7 +12571,7 @@
                 <a:effectLst/>
                 <a:latin typeface="Consolas" panose="020B0609020204030204" pitchFamily="49" charset="0"/>
               </a:rPr>
-              <a:t> 1</a:t>
+              <a:t>"</a:t>
             </a:r>
             <a:r>
               <a:rPr lang="ko-KR" altLang="en-US" b="0" dirty="0">
@@ -12349,7 +12581,7 @@
                 <a:effectLst/>
                 <a:latin typeface="Consolas" panose="020B0609020204030204" pitchFamily="49" charset="0"/>
               </a:rPr>
-              <a:t>의 평균</a:t>
+              <a:t>표본 </a:t>
             </a:r>
             <a:r>
               <a:rPr lang="en-US" altLang="ko-KR" b="0" dirty="0">
@@ -12359,6 +12591,26 @@
                 <a:effectLst/>
                 <a:latin typeface="Consolas" panose="020B0609020204030204" pitchFamily="49" charset="0"/>
               </a:rPr>
+              <a:t>sample 1</a:t>
+            </a:r>
+            <a:r>
+              <a:rPr lang="ko-KR" altLang="en-US" b="0" dirty="0">
+                <a:solidFill>
+                  <a:srgbClr val="00B0F0"/>
+                </a:solidFill>
+                <a:effectLst/>
+                <a:latin typeface="Consolas" panose="020B0609020204030204" pitchFamily="49" charset="0"/>
+              </a:rPr>
+              <a:t>의 평균</a:t>
+            </a:r>
+            <a:r>
+              <a:rPr lang="en-US" altLang="ko-KR" b="0" dirty="0">
+                <a:solidFill>
+                  <a:srgbClr val="00B0F0"/>
+                </a:solidFill>
+                <a:effectLst/>
+                <a:latin typeface="Consolas" panose="020B0609020204030204" pitchFamily="49" charset="0"/>
+              </a:rPr>
               <a:t>: </a:t>
             </a:r>
             <a:r>
@@ -12420,7 +12672,7 @@
                 </a:solidFill>
                 <a:latin typeface="Consolas" panose="020B0609020204030204" pitchFamily="49" charset="0"/>
               </a:rPr>
-              <a:t>2</a:t>
+              <a:t>3</a:t>
             </a:r>
             <a:r>
               <a:rPr lang="en-US" altLang="ko-KR" dirty="0">
@@ -12460,6 +12712,12 @@
           </a:p>
           <a:p>
             <a:r>
+              <a:rPr lang="ko-KR" altLang="en-US" b="1" dirty="0">
+                <a:latin typeface="Consolas" panose="020B0609020204030204" pitchFamily="49" charset="0"/>
+              </a:rPr>
+              <a:t>모집단 </a:t>
+            </a:r>
+            <a:r>
               <a:rPr lang="en-US" altLang="ko-KR" b="1" dirty="0" err="1">
                 <a:latin typeface="Consolas" panose="020B0609020204030204" pitchFamily="49" charset="0"/>
               </a:rPr>
@@ -12475,10 +12733,26 @@
               <a:rPr lang="en-US" altLang="ko-KR" b="1" dirty="0">
                 <a:latin typeface="Consolas" panose="020B0609020204030204" pitchFamily="49" charset="0"/>
               </a:rPr>
-              <a:t>: score 7.48</a:t>
-            </a:r>
-          </a:p>
-          <a:p>
+              <a:t>: score </a:t>
+            </a:r>
+            <a:r>
+              <a:rPr lang="en-US" altLang="ko-KR" b="1" i="0" dirty="0">
+                <a:solidFill>
+                  <a:srgbClr val="27262E"/>
+                </a:solidFill>
+                <a:effectLst/>
+                <a:latin typeface="Pretendard Variable"/>
+              </a:rPr>
+              <a:t>7.495</a:t>
+            </a:r>
+          </a:p>
+          <a:p>
+            <a:r>
+              <a:rPr lang="ko-KR" altLang="en-US" b="1" dirty="0">
+                <a:latin typeface="Consolas" panose="020B0609020204030204" pitchFamily="49" charset="0"/>
+              </a:rPr>
+              <a:t>표본 </a:t>
+            </a:r>
             <a:r>
               <a:rPr lang="en-US" altLang="ko-KR" b="1" dirty="0">
                 <a:latin typeface="Consolas" panose="020B0609020204030204" pitchFamily="49" charset="0"/>
@@ -12495,8 +12769,21 @@
               <a:rPr lang="en-US" altLang="ko-KR" b="1" dirty="0">
                 <a:latin typeface="Consolas" panose="020B0609020204030204" pitchFamily="49" charset="0"/>
               </a:rPr>
-              <a:t>: score 7.45</a:t>
-            </a:r>
+              <a:t>: score </a:t>
+            </a:r>
+            <a:r>
+              <a:rPr lang="en-US" altLang="ko-KR" b="1" i="0" dirty="0">
+                <a:solidFill>
+                  <a:srgbClr val="27262E"/>
+                </a:solidFill>
+                <a:effectLst/>
+                <a:latin typeface="Pretendard Variable"/>
+              </a:rPr>
+              <a:t>7.481</a:t>
+            </a:r>
+            <a:endParaRPr lang="en-US" altLang="ko-KR" b="1" dirty="0">
+              <a:latin typeface="Consolas" panose="020B0609020204030204" pitchFamily="49" charset="0"/>
+            </a:endParaRPr>
           </a:p>
         </p:txBody>
       </p:sp>
@@ -14618,7 +14905,7 @@
         <p:spPr>
           <a:xfrm>
             <a:off x="615778" y="2109033"/>
-            <a:ext cx="10960443" cy="4247317"/>
+            <a:ext cx="10960443" cy="3447098"/>
           </a:xfrm>
           <a:prstGeom prst="rect">
             <a:avLst/>
@@ -14651,14 +14938,6 @@
               <a:rPr lang="en-US" altLang="ko-KR" sz="1800" b="1" dirty="0"/>
               <a:t>?</a:t>
             </a:r>
-            <a:endParaRPr lang="pt-BR" altLang="ko-KR" b="1" dirty="0">
-              <a:solidFill>
-                <a:srgbClr val="BBBEBF"/>
-              </a:solidFill>
-              <a:latin typeface="Consolas" panose="020B0609020204030204" pitchFamily="49" charset="0"/>
-            </a:endParaRPr>
-          </a:p>
-          <a:p>
             <a:endParaRPr lang="en-US" altLang="ko-KR" dirty="0">
               <a:solidFill>
                 <a:srgbClr val="BBBEBF"/>
@@ -14667,6 +14946,11 @@
             </a:endParaRPr>
           </a:p>
           <a:p>
+            <a:pPr>
+              <a:spcBef>
+                <a:spcPts val="600"/>
+              </a:spcBef>
+            </a:pPr>
             <a:r>
               <a:rPr lang="ko-KR" altLang="en-US" dirty="0"/>
               <a:t>▶️ 표본 평균들은 모집단 평균</a:t>
@@ -14709,13 +14993,18 @@
             </a:r>
           </a:p>
           <a:p>
+            <a:pPr>
+              <a:spcBef>
+                <a:spcPts val="600"/>
+              </a:spcBef>
+            </a:pPr>
             <a:r>
               <a:rPr lang="ko-KR" altLang="en-US" dirty="0"/>
-              <a:t>이는 **</a:t>
+              <a:t>이는 </a:t>
             </a:r>
             <a:r>
               <a:rPr lang="en-US" altLang="ko-KR" dirty="0"/>
-              <a:t>"</a:t>
+              <a:t>‘</a:t>
             </a:r>
             <a:r>
               <a:rPr lang="ko-KR" altLang="en-US" dirty="0"/>
@@ -14731,7 +15020,7 @@
             </a:r>
             <a:r>
               <a:rPr lang="en-US" altLang="ko-KR" dirty="0"/>
-              <a:t>"**</a:t>
+              <a:t>’</a:t>
             </a:r>
             <a:r>
               <a:rPr lang="ko-KR" altLang="en-US" dirty="0"/>
@@ -14742,8 +15031,14 @@
               <a:t>(</a:t>
             </a:r>
             <a:r>
-              <a:rPr lang="ko-KR" altLang="en-US" dirty="0" err="1"/>
-              <a:t>불편추정량</a:t>
+              <a:rPr lang="ko-KR" altLang="en-US" b="0" i="0" dirty="0">
+                <a:solidFill>
+                  <a:srgbClr val="27262E"/>
+                </a:solidFill>
+                <a:effectLst/>
+                <a:latin typeface="Pretendard Variable"/>
+              </a:rPr>
+              <a:t>비편향성</a:t>
             </a:r>
             <a:r>
               <a:rPr lang="en-US" altLang="ko-KR" dirty="0"/>
@@ -14765,6 +15060,8 @@
               <a:rPr lang="en-US" altLang="ko-KR" dirty="0"/>
               <a:t>.</a:t>
             </a:r>
+          </a:p>
+          <a:p>
             <a:endParaRPr lang="en-US" altLang="ko-KR" dirty="0">
               <a:solidFill>
                 <a:srgbClr val="BBBEBF"/>
@@ -14773,14 +15070,6 @@
             </a:endParaRPr>
           </a:p>
           <a:p>
-            <a:endParaRPr lang="en-US" altLang="ko-KR" dirty="0">
-              <a:solidFill>
-                <a:srgbClr val="BBBEBF"/>
-              </a:solidFill>
-              <a:latin typeface="Consolas" panose="020B0609020204030204" pitchFamily="49" charset="0"/>
-            </a:endParaRPr>
-          </a:p>
-          <a:p>
             <a:r>
               <a:rPr lang="ko-KR" altLang="en-US" b="1" dirty="0"/>
               <a:t>표본을 </a:t>
@@ -14809,11 +15098,18 @@
               <a:rPr lang="ko-KR" altLang="en-US" b="1" dirty="0"/>
               <a:t>표본 평균의 분포나 신뢰성에는 어떤 차이가 있나요</a:t>
             </a:r>
-          </a:p>
-          <a:p>
+            <a:r>
+              <a:rPr lang="en-US" altLang="ko-KR" b="1" dirty="0"/>
+              <a:t>?</a:t>
+            </a:r>
             <a:endParaRPr lang="en-US" altLang="ko-KR" dirty="0"/>
           </a:p>
           <a:p>
+            <a:pPr>
+              <a:spcBef>
+                <a:spcPts val="600"/>
+              </a:spcBef>
+            </a:pPr>
             <a:r>
               <a:rPr lang="ko-KR" altLang="en-US" dirty="0"/>
               <a:t>▶️ 표본을 </a:t>
@@ -14848,6 +15144,11 @@
             </a:r>
           </a:p>
           <a:p>
+            <a:pPr>
+              <a:spcBef>
+                <a:spcPts val="600"/>
+              </a:spcBef>
+            </a:pPr>
             <a:r>
               <a:rPr lang="ko-KR" altLang="en-US" dirty="0"/>
               <a:t>반면 </a:t>
@@ -14862,7 +15163,7 @@
             </a:r>
             <a:r>
               <a:rPr lang="en-US" altLang="ko-KR" dirty="0"/>
-              <a:t>"</a:t>
+              <a:t>‘</a:t>
             </a:r>
             <a:r>
               <a:rPr lang="ko-KR" altLang="en-US" dirty="0"/>
@@ -14870,7 +15171,7 @@
             </a:r>
             <a:r>
               <a:rPr lang="en-US" altLang="ko-KR" dirty="0"/>
-              <a:t>"</a:t>
+              <a:t>’</a:t>
             </a:r>
             <a:r>
               <a:rPr lang="ko-KR" altLang="en-US" dirty="0"/>
@@ -14899,44 +15200,6 @@
             <a:r>
               <a:rPr lang="ko-KR" altLang="en-US" dirty="0"/>
               <a:t>를 계산하고 추정의 정밀도를 정량적으로 파악할 수 있다</a:t>
-            </a:r>
-            <a:r>
-              <a:rPr lang="en-US" altLang="ko-KR" dirty="0"/>
-              <a:t>.</a:t>
-            </a:r>
-          </a:p>
-          <a:p>
-            <a:r>
-              <a:rPr lang="ko-KR" altLang="en-US" dirty="0"/>
-              <a:t>반복 횟수가 많아질수록 표본평균이 모평균에 더 근접하는 **</a:t>
-            </a:r>
-            <a:r>
-              <a:rPr lang="ko-KR" altLang="en-US" dirty="0" err="1"/>
-              <a:t>일치성</a:t>
-            </a:r>
-            <a:r>
-              <a:rPr lang="en-US" altLang="ko-KR" dirty="0"/>
-              <a:t>(</a:t>
-            </a:r>
-            <a:r>
-              <a:rPr lang="ko-KR" altLang="en-US" dirty="0"/>
-              <a:t>큰 수의 법칙</a:t>
-            </a:r>
-            <a:r>
-              <a:rPr lang="en-US" altLang="ko-KR" dirty="0"/>
-              <a:t>)**</a:t>
-            </a:r>
-            <a:r>
-              <a:rPr lang="ko-KR" altLang="en-US" dirty="0"/>
-              <a:t>이 나타나며</a:t>
-            </a:r>
-            <a:r>
-              <a:rPr lang="en-US" altLang="ko-KR" dirty="0"/>
-              <a:t>, </a:t>
-            </a:r>
-            <a:r>
-              <a:rPr lang="ko-KR" altLang="en-US" dirty="0"/>
-              <a:t>이에 따라 신뢰성도 함께 높아진다</a:t>
             </a:r>
             <a:r>
               <a:rPr lang="en-US" altLang="ko-KR" dirty="0"/>
